--- a/slides/Slides_tidydata.pptx
+++ b/slides/Slides_tidydata.pptx
@@ -11,14 +11,15 @@
     <p:sldId id="257" r:id="rId5"/>
     <p:sldId id="259" r:id="rId6"/>
     <p:sldId id="261" r:id="rId7"/>
-    <p:sldId id="270" r:id="rId8"/>
-    <p:sldId id="272" r:id="rId9"/>
-    <p:sldId id="262" r:id="rId10"/>
-    <p:sldId id="264" r:id="rId11"/>
-    <p:sldId id="266" r:id="rId12"/>
-    <p:sldId id="267" r:id="rId13"/>
-    <p:sldId id="273" r:id="rId14"/>
-    <p:sldId id="260" r:id="rId15"/>
+    <p:sldId id="274" r:id="rId8"/>
+    <p:sldId id="270" r:id="rId9"/>
+    <p:sldId id="272" r:id="rId10"/>
+    <p:sldId id="262" r:id="rId11"/>
+    <p:sldId id="264" r:id="rId12"/>
+    <p:sldId id="266" r:id="rId13"/>
+    <p:sldId id="267" r:id="rId14"/>
+    <p:sldId id="273" r:id="rId15"/>
+    <p:sldId id="260" r:id="rId16"/>
   </p:sldIdLst>
   <p:sldSz cx="9144000" cy="5143500" type="screen16x9"/>
   <p:notesSz cx="6858000" cy="9144000"/>
@@ -304,7 +305,7 @@
           <a:p>
             <a:fld id="{BAB96B47-EBE1-7147-975B-DE61DA6681A3}" type="datetimeFigureOut">
               <a:rPr lang="en-US" smtClean="0"/>
-              <a:t>9/25/24</a:t>
+              <a:t>9/24/26</a:t>
             </a:fld>
             <a:endParaRPr lang="en-US"/>
           </a:p>
@@ -472,7 +473,7 @@
           <a:p>
             <a:fld id="{BAB96B47-EBE1-7147-975B-DE61DA6681A3}" type="datetimeFigureOut">
               <a:rPr lang="en-US" smtClean="0"/>
-              <a:t>9/25/24</a:t>
+              <a:t>9/24/26</a:t>
             </a:fld>
             <a:endParaRPr lang="en-US"/>
           </a:p>
@@ -650,7 +651,7 @@
           <a:p>
             <a:fld id="{BAB96B47-EBE1-7147-975B-DE61DA6681A3}" type="datetimeFigureOut">
               <a:rPr lang="en-US" smtClean="0"/>
-              <a:t>9/25/24</a:t>
+              <a:t>9/24/26</a:t>
             </a:fld>
             <a:endParaRPr lang="en-US"/>
           </a:p>
@@ -818,7 +819,7 @@
           <a:p>
             <a:fld id="{BAB96B47-EBE1-7147-975B-DE61DA6681A3}" type="datetimeFigureOut">
               <a:rPr lang="en-US" smtClean="0"/>
-              <a:t>9/25/24</a:t>
+              <a:t>9/24/26</a:t>
             </a:fld>
             <a:endParaRPr lang="en-US"/>
           </a:p>
@@ -1063,7 +1064,7 @@
           <a:p>
             <a:fld id="{BAB96B47-EBE1-7147-975B-DE61DA6681A3}" type="datetimeFigureOut">
               <a:rPr lang="en-US" smtClean="0"/>
-              <a:t>9/25/24</a:t>
+              <a:t>9/24/26</a:t>
             </a:fld>
             <a:endParaRPr lang="en-US"/>
           </a:p>
@@ -1348,7 +1349,7 @@
           <a:p>
             <a:fld id="{BAB96B47-EBE1-7147-975B-DE61DA6681A3}" type="datetimeFigureOut">
               <a:rPr lang="en-US" smtClean="0"/>
-              <a:t>9/25/24</a:t>
+              <a:t>9/24/26</a:t>
             </a:fld>
             <a:endParaRPr lang="en-US"/>
           </a:p>
@@ -1767,7 +1768,7 @@
           <a:p>
             <a:fld id="{BAB96B47-EBE1-7147-975B-DE61DA6681A3}" type="datetimeFigureOut">
               <a:rPr lang="en-US" smtClean="0"/>
-              <a:t>9/25/24</a:t>
+              <a:t>9/24/26</a:t>
             </a:fld>
             <a:endParaRPr lang="en-US"/>
           </a:p>
@@ -1884,7 +1885,7 @@
           <a:p>
             <a:fld id="{BAB96B47-EBE1-7147-975B-DE61DA6681A3}" type="datetimeFigureOut">
               <a:rPr lang="en-US" smtClean="0"/>
-              <a:t>9/25/24</a:t>
+              <a:t>9/24/26</a:t>
             </a:fld>
             <a:endParaRPr lang="en-US"/>
           </a:p>
@@ -1979,7 +1980,7 @@
           <a:p>
             <a:fld id="{BAB96B47-EBE1-7147-975B-DE61DA6681A3}" type="datetimeFigureOut">
               <a:rPr lang="en-US" smtClean="0"/>
-              <a:t>9/25/24</a:t>
+              <a:t>9/24/26</a:t>
             </a:fld>
             <a:endParaRPr lang="en-US"/>
           </a:p>
@@ -2254,7 +2255,7 @@
           <a:p>
             <a:fld id="{BAB96B47-EBE1-7147-975B-DE61DA6681A3}" type="datetimeFigureOut">
               <a:rPr lang="en-US" smtClean="0"/>
-              <a:t>9/25/24</a:t>
+              <a:t>9/24/26</a:t>
             </a:fld>
             <a:endParaRPr lang="en-US"/>
           </a:p>
@@ -2509,7 +2510,7 @@
           <a:p>
             <a:fld id="{BAB96B47-EBE1-7147-975B-DE61DA6681A3}" type="datetimeFigureOut">
               <a:rPr lang="en-US" smtClean="0"/>
-              <a:t>9/25/24</a:t>
+              <a:t>9/24/26</a:t>
             </a:fld>
             <a:endParaRPr lang="en-US"/>
           </a:p>
@@ -2723,7 +2724,7 @@
             <a:fld id="{BAB96B47-EBE1-7147-975B-DE61DA6681A3}" type="datetimeFigureOut">
               <a:rPr lang="en-US" smtClean="0"/>
               <a:pPr/>
-              <a:t>9/25/24</a:t>
+              <a:t>9/24/26</a:t>
             </a:fld>
             <a:endParaRPr lang="en-US"/>
           </a:p>
@@ -3210,6 +3211,197 @@
             <a:pPr algn="l"/>
             <a:r>
               <a:rPr lang="en-US" dirty="0" err="1"/>
+              <a:t>pivot_longer</a:t>
+            </a:r>
+            <a:r>
+              <a:rPr lang="en-US" dirty="0"/>
+              <a:t>()</a:t>
+            </a:r>
+          </a:p>
+        </p:txBody>
+      </p:sp>
+      <p:pic>
+        <p:nvPicPr>
+          <p:cNvPr id="1026" name="Picture 2" descr="Pivoting `table4` into a longer, tidy form.">
+            <a:extLst>
+              <a:ext uri="{FF2B5EF4-FFF2-40B4-BE49-F238E27FC236}">
+                <a16:creationId xmlns:a16="http://schemas.microsoft.com/office/drawing/2014/main" id="{EC7CBF08-835A-9940-BB14-EBBAA325D1B9}"/>
+              </a:ext>
+            </a:extLst>
+          </p:cNvPr>
+          <p:cNvPicPr>
+            <a:picLocks noChangeAspect="1" noChangeArrowheads="1"/>
+          </p:cNvPicPr>
+          <p:nvPr/>
+        </p:nvPicPr>
+        <p:blipFill>
+          <a:blip r:embed="rId2">
+            <a:extLst>
+              <a:ext uri="{28A0092B-C50C-407E-A947-70E740481C1C}">
+                <a14:useLocalDpi xmlns:a14="http://schemas.microsoft.com/office/drawing/2010/main" val="0"/>
+              </a:ext>
+            </a:extLst>
+          </a:blip>
+          <a:srcRect/>
+          <a:stretch>
+            <a:fillRect/>
+          </a:stretch>
+        </p:blipFill>
+        <p:spPr bwMode="auto">
+          <a:xfrm>
+            <a:off x="1338943" y="2406081"/>
+            <a:ext cx="8066314" cy="2520723"/>
+          </a:xfrm>
+          <a:prstGeom prst="rect">
+            <a:avLst/>
+          </a:prstGeom>
+          <a:noFill/>
+          <a:extLst>
+            <a:ext uri="{909E8E84-426E-40DD-AFC4-6F175D3DCCD1}">
+              <a14:hiddenFill xmlns:a14="http://schemas.microsoft.com/office/drawing/2010/main">
+                <a:solidFill>
+                  <a:srgbClr val="FFFFFF"/>
+                </a:solidFill>
+              </a14:hiddenFill>
+            </a:ext>
+          </a:extLst>
+        </p:spPr>
+      </p:pic>
+      <p:sp>
+        <p:nvSpPr>
+          <p:cNvPr id="8" name="TextBox 7">
+            <a:extLst>
+              <a:ext uri="{FF2B5EF4-FFF2-40B4-BE49-F238E27FC236}">
+                <a16:creationId xmlns:a16="http://schemas.microsoft.com/office/drawing/2014/main" id="{61923A5B-6188-2340-AF2E-D33BB6C039F8}"/>
+              </a:ext>
+            </a:extLst>
+          </p:cNvPr>
+          <p:cNvSpPr txBox="1"/>
+          <p:nvPr/>
+        </p:nvSpPr>
+        <p:spPr>
+          <a:xfrm>
+            <a:off x="537410" y="1305075"/>
+            <a:ext cx="7234989" cy="584775"/>
+          </a:xfrm>
+          <a:prstGeom prst="rect">
+            <a:avLst/>
+          </a:prstGeom>
+          <a:noFill/>
+        </p:spPr>
+        <p:txBody>
+          <a:bodyPr wrap="square">
+            <a:spAutoFit/>
+          </a:bodyPr>
+          <a:lstStyle/>
+          <a:p>
+            <a:r>
+              <a:rPr lang="en-US" sz="1600" dirty="0">
+                <a:latin typeface="Avenir Book" panose="02000503020000020003" pitchFamily="2" charset="0"/>
+              </a:rPr>
+              <a:t>table4a %&gt;% </a:t>
+            </a:r>
+          </a:p>
+          <a:p>
+            <a:r>
+              <a:rPr lang="en-US" sz="1600" dirty="0">
+                <a:latin typeface="Avenir Book" panose="02000503020000020003" pitchFamily="2" charset="0"/>
+              </a:rPr>
+              <a:t>  </a:t>
+            </a:r>
+            <a:r>
+              <a:rPr lang="en-US" sz="1600" dirty="0" err="1">
+                <a:latin typeface="Avenir Book" panose="02000503020000020003" pitchFamily="2" charset="0"/>
+              </a:rPr>
+              <a:t>pivot_longer</a:t>
+            </a:r>
+            <a:r>
+              <a:rPr lang="en-US" sz="1600" dirty="0">
+                <a:latin typeface="Avenir Book" panose="02000503020000020003" pitchFamily="2" charset="0"/>
+              </a:rPr>
+              <a:t>(c(`1999`, `2000`), </a:t>
+            </a:r>
+            <a:r>
+              <a:rPr lang="en-US" sz="1600" dirty="0" err="1">
+                <a:latin typeface="Avenir Book" panose="02000503020000020003" pitchFamily="2" charset="0"/>
+              </a:rPr>
+              <a:t>names_to</a:t>
+            </a:r>
+            <a:r>
+              <a:rPr lang="en-US" sz="1600" dirty="0">
+                <a:latin typeface="Avenir Book" panose="02000503020000020003" pitchFamily="2" charset="0"/>
+              </a:rPr>
+              <a:t> = "year", </a:t>
+            </a:r>
+            <a:r>
+              <a:rPr lang="en-US" sz="1600" dirty="0" err="1">
+                <a:latin typeface="Avenir Book" panose="02000503020000020003" pitchFamily="2" charset="0"/>
+              </a:rPr>
+              <a:t>values_to</a:t>
+            </a:r>
+            <a:r>
+              <a:rPr lang="en-US" sz="1600" dirty="0">
+                <a:latin typeface="Avenir Book" panose="02000503020000020003" pitchFamily="2" charset="0"/>
+              </a:rPr>
+              <a:t> = "cases")</a:t>
+            </a:r>
+          </a:p>
+        </p:txBody>
+      </p:sp>
+    </p:spTree>
+    <p:extLst>
+      <p:ext uri="{BB962C8B-B14F-4D97-AF65-F5344CB8AC3E}">
+        <p14:creationId xmlns:p14="http://schemas.microsoft.com/office/powerpoint/2010/main" val="1477975852"/>
+      </p:ext>
+    </p:extLst>
+  </p:cSld>
+  <p:clrMapOvr>
+    <a:masterClrMapping/>
+  </p:clrMapOvr>
+</p:sld>
+</file>
+
+<file path=ppt/slides/slide11.xml><?xml version="1.0" encoding="utf-8"?>
+<p:sld xmlns:a="http://schemas.openxmlformats.org/drawingml/2006/main" xmlns:r="http://schemas.openxmlformats.org/officeDocument/2006/relationships" xmlns:p="http://schemas.openxmlformats.org/presentationml/2006/main">
+  <p:cSld>
+    <p:spTree>
+      <p:nvGrpSpPr>
+        <p:cNvPr id="1" name=""/>
+        <p:cNvGrpSpPr/>
+        <p:nvPr/>
+      </p:nvGrpSpPr>
+      <p:grpSpPr>
+        <a:xfrm>
+          <a:off x="0" y="0"/>
+          <a:ext cx="0" cy="0"/>
+          <a:chOff x="0" y="0"/>
+          <a:chExt cx="0" cy="0"/>
+        </a:xfrm>
+      </p:grpSpPr>
+      <p:sp>
+        <p:nvSpPr>
+          <p:cNvPr id="2" name="Title 1">
+            <a:extLst>
+              <a:ext uri="{FF2B5EF4-FFF2-40B4-BE49-F238E27FC236}">
+                <a16:creationId xmlns:a16="http://schemas.microsoft.com/office/drawing/2014/main" id="{8AFDD491-0015-C04A-B78B-04AB3ACB2BE1}"/>
+              </a:ext>
+            </a:extLst>
+          </p:cNvPr>
+          <p:cNvSpPr>
+            <a:spLocks noGrp="1"/>
+          </p:cNvSpPr>
+          <p:nvPr>
+            <p:ph type="title"/>
+          </p:nvPr>
+        </p:nvSpPr>
+        <p:spPr/>
+        <p:txBody>
+          <a:bodyPr/>
+          <a:lstStyle/>
+          <a:p>
+            <a:pPr algn="l"/>
+            <a:r>
+              <a:rPr lang="en-US" dirty="0" err="1"/>
               <a:t>pivot_wider</a:t>
             </a:r>
             <a:r>
@@ -3360,7 +3552,7 @@
 </p:sld>
 </file>
 
-<file path=ppt/slides/slide11.xml><?xml version="1.0" encoding="utf-8"?>
+<file path=ppt/slides/slide12.xml><?xml version="1.0" encoding="utf-8"?>
 <p:sld xmlns:a="http://schemas.openxmlformats.org/drawingml/2006/main" xmlns:r="http://schemas.openxmlformats.org/officeDocument/2006/relationships" xmlns:p="http://schemas.openxmlformats.org/presentationml/2006/main">
   <p:cSld>
     <p:spTree>
@@ -3571,162 +3763,6 @@
 </p:sld>
 </file>
 
-<file path=ppt/slides/slide12.xml><?xml version="1.0" encoding="utf-8"?>
-<p:sld xmlns:a="http://schemas.openxmlformats.org/drawingml/2006/main" xmlns:r="http://schemas.openxmlformats.org/officeDocument/2006/relationships" xmlns:p="http://schemas.openxmlformats.org/presentationml/2006/main">
-  <p:cSld>
-    <p:spTree>
-      <p:nvGrpSpPr>
-        <p:cNvPr id="1" name=""/>
-        <p:cNvGrpSpPr/>
-        <p:nvPr/>
-      </p:nvGrpSpPr>
-      <p:grpSpPr>
-        <a:xfrm>
-          <a:off x="0" y="0"/>
-          <a:ext cx="0" cy="0"/>
-          <a:chOff x="0" y="0"/>
-          <a:chExt cx="0" cy="0"/>
-        </a:xfrm>
-      </p:grpSpPr>
-      <p:sp>
-        <p:nvSpPr>
-          <p:cNvPr id="2" name="Title 1">
-            <a:extLst>
-              <a:ext uri="{FF2B5EF4-FFF2-40B4-BE49-F238E27FC236}">
-                <a16:creationId xmlns:a16="http://schemas.microsoft.com/office/drawing/2014/main" id="{AC37DB7B-F69F-FB43-97BA-FB98F6905E8C}"/>
-              </a:ext>
-            </a:extLst>
-          </p:cNvPr>
-          <p:cNvSpPr>
-            <a:spLocks noGrp="1"/>
-          </p:cNvSpPr>
-          <p:nvPr>
-            <p:ph type="title"/>
-          </p:nvPr>
-        </p:nvSpPr>
-        <p:spPr/>
-        <p:txBody>
-          <a:bodyPr/>
-          <a:lstStyle/>
-          <a:p>
-            <a:pPr algn="l"/>
-            <a:r>
-              <a:rPr lang="en-US" dirty="0"/>
-              <a:t>Exercise – LOTR data</a:t>
-            </a:r>
-          </a:p>
-        </p:txBody>
-      </p:sp>
-      <p:sp>
-        <p:nvSpPr>
-          <p:cNvPr id="3" name="Content Placeholder 2">
-            <a:extLst>
-              <a:ext uri="{FF2B5EF4-FFF2-40B4-BE49-F238E27FC236}">
-                <a16:creationId xmlns:a16="http://schemas.microsoft.com/office/drawing/2014/main" id="{22A9FF0B-7B30-694D-8952-751C83952364}"/>
-              </a:ext>
-            </a:extLst>
-          </p:cNvPr>
-          <p:cNvSpPr>
-            <a:spLocks noGrp="1"/>
-          </p:cNvSpPr>
-          <p:nvPr>
-            <p:ph idx="1"/>
-          </p:nvPr>
-        </p:nvSpPr>
-        <p:spPr>
-          <a:xfrm>
-            <a:off x="457200" y="1543049"/>
-            <a:ext cx="8229600" cy="3394472"/>
-          </a:xfrm>
-        </p:spPr>
-        <p:txBody>
-          <a:bodyPr>
-            <a:normAutofit/>
-          </a:bodyPr>
-          <a:lstStyle/>
-          <a:p>
-            <a:pPr marL="457200" indent="-457200">
-              <a:buFont typeface="+mj-lt"/>
-              <a:buAutoNum type="arabicPeriod"/>
-            </a:pPr>
-            <a:r>
-              <a:rPr lang="en-US" sz="2200" dirty="0"/>
-              <a:t>After tidying the data and completing your analysis, you may want to output a table that has each race in its own column. Let’s use the </a:t>
-            </a:r>
-            <a:r>
-              <a:rPr lang="en-US" sz="2200" dirty="0" err="1"/>
-              <a:t>pivot_wider</a:t>
-            </a:r>
-            <a:r>
-              <a:rPr lang="en-US" sz="2200" dirty="0"/>
-              <a:t>() function to make such a table and save it as “</a:t>
-            </a:r>
-            <a:r>
-              <a:rPr lang="en-US" sz="2200" dirty="0" err="1"/>
-              <a:t>lotr_wide</a:t>
-            </a:r>
-            <a:r>
-              <a:rPr lang="en-US" sz="2200" dirty="0"/>
-              <a:t>”</a:t>
-            </a:r>
-            <a:br>
-              <a:rPr lang="en-US" sz="2200" dirty="0"/>
-            </a:br>
-            <a:endParaRPr lang="en-US" sz="2200" dirty="0"/>
-          </a:p>
-          <a:p>
-            <a:pPr marL="457200" indent="-457200">
-              <a:buFont typeface="+mj-lt"/>
-              <a:buAutoNum type="arabicPeriod"/>
-            </a:pPr>
-            <a:r>
-              <a:rPr lang="en-US" sz="2200" dirty="0"/>
-              <a:t>OPTIONAL: Use the </a:t>
-            </a:r>
-            <a:r>
-              <a:rPr lang="en-US" sz="2200" dirty="0" err="1"/>
-              <a:t>pivot_longer</a:t>
-            </a:r>
-            <a:r>
-              <a:rPr lang="en-US" sz="2200" dirty="0"/>
-              <a:t>() function to transform you </a:t>
-            </a:r>
-            <a:r>
-              <a:rPr lang="en-US" sz="2200" dirty="0" err="1"/>
-              <a:t>lotr_wide</a:t>
-            </a:r>
-            <a:r>
-              <a:rPr lang="en-US" sz="2200" dirty="0"/>
-              <a:t> back to tidy format.</a:t>
-            </a:r>
-          </a:p>
-          <a:p>
-            <a:pPr marL="0" indent="0">
-              <a:buNone/>
-            </a:pPr>
-            <a:br>
-              <a:rPr lang="en-US" sz="2200" dirty="0"/>
-            </a:br>
-            <a:endParaRPr lang="en-US" sz="2200" dirty="0"/>
-          </a:p>
-          <a:p>
-            <a:endParaRPr lang="en-US" sz="2200" dirty="0"/>
-          </a:p>
-        </p:txBody>
-      </p:sp>
-    </p:spTree>
-    <p:extLst>
-      <p:ext uri="{BB962C8B-B14F-4D97-AF65-F5344CB8AC3E}">
-        <p14:creationId xmlns:p14="http://schemas.microsoft.com/office/powerpoint/2010/main" val="1014736989"/>
-      </p:ext>
-    </p:extLst>
-  </p:cSld>
-  <p:clrMapOvr>
-    <a:masterClrMapping/>
-  </p:clrMapOvr>
-</p:sld>
-</file>
-
 <file path=ppt/slides/slide13.xml><?xml version="1.0" encoding="utf-8"?>
 <p:sld xmlns:a="http://schemas.openxmlformats.org/drawingml/2006/main" xmlns:r="http://schemas.openxmlformats.org/officeDocument/2006/relationships" xmlns:p="http://schemas.openxmlformats.org/presentationml/2006/main">
   <p:cSld>
@@ -3749,6 +3785,162 @@
           <p:cNvPr id="2" name="Title 1">
             <a:extLst>
               <a:ext uri="{FF2B5EF4-FFF2-40B4-BE49-F238E27FC236}">
+                <a16:creationId xmlns:a16="http://schemas.microsoft.com/office/drawing/2014/main" id="{AC37DB7B-F69F-FB43-97BA-FB98F6905E8C}"/>
+              </a:ext>
+            </a:extLst>
+          </p:cNvPr>
+          <p:cNvSpPr>
+            <a:spLocks noGrp="1"/>
+          </p:cNvSpPr>
+          <p:nvPr>
+            <p:ph type="title"/>
+          </p:nvPr>
+        </p:nvSpPr>
+        <p:spPr/>
+        <p:txBody>
+          <a:bodyPr/>
+          <a:lstStyle/>
+          <a:p>
+            <a:pPr algn="l"/>
+            <a:r>
+              <a:rPr lang="en-US" dirty="0"/>
+              <a:t>Exercise – LOTR data</a:t>
+            </a:r>
+          </a:p>
+        </p:txBody>
+      </p:sp>
+      <p:sp>
+        <p:nvSpPr>
+          <p:cNvPr id="3" name="Content Placeholder 2">
+            <a:extLst>
+              <a:ext uri="{FF2B5EF4-FFF2-40B4-BE49-F238E27FC236}">
+                <a16:creationId xmlns:a16="http://schemas.microsoft.com/office/drawing/2014/main" id="{22A9FF0B-7B30-694D-8952-751C83952364}"/>
+              </a:ext>
+            </a:extLst>
+          </p:cNvPr>
+          <p:cNvSpPr>
+            <a:spLocks noGrp="1"/>
+          </p:cNvSpPr>
+          <p:nvPr>
+            <p:ph idx="1"/>
+          </p:nvPr>
+        </p:nvSpPr>
+        <p:spPr>
+          <a:xfrm>
+            <a:off x="457200" y="1543049"/>
+            <a:ext cx="8229600" cy="3394472"/>
+          </a:xfrm>
+        </p:spPr>
+        <p:txBody>
+          <a:bodyPr>
+            <a:normAutofit/>
+          </a:bodyPr>
+          <a:lstStyle/>
+          <a:p>
+            <a:pPr marL="457200" indent="-457200">
+              <a:buFont typeface="+mj-lt"/>
+              <a:buAutoNum type="arabicPeriod"/>
+            </a:pPr>
+            <a:r>
+              <a:rPr lang="en-US" sz="2200" dirty="0"/>
+              <a:t>After tidying the data and completing your analysis, you may want to output a table that has each race in its own column. Let’s use the </a:t>
+            </a:r>
+            <a:r>
+              <a:rPr lang="en-US" sz="2200" dirty="0" err="1"/>
+              <a:t>pivot_wider</a:t>
+            </a:r>
+            <a:r>
+              <a:rPr lang="en-US" sz="2200" dirty="0"/>
+              <a:t>() function to make such a table and save it as “</a:t>
+            </a:r>
+            <a:r>
+              <a:rPr lang="en-US" sz="2200" dirty="0" err="1"/>
+              <a:t>lotr_wide</a:t>
+            </a:r>
+            <a:r>
+              <a:rPr lang="en-US" sz="2200" dirty="0"/>
+              <a:t>”</a:t>
+            </a:r>
+            <a:br>
+              <a:rPr lang="en-US" sz="2200" dirty="0"/>
+            </a:br>
+            <a:endParaRPr lang="en-US" sz="2200" dirty="0"/>
+          </a:p>
+          <a:p>
+            <a:pPr marL="457200" indent="-457200">
+              <a:buFont typeface="+mj-lt"/>
+              <a:buAutoNum type="arabicPeriod"/>
+            </a:pPr>
+            <a:r>
+              <a:rPr lang="en-US" sz="2200" dirty="0"/>
+              <a:t>OPTIONAL: Use the </a:t>
+            </a:r>
+            <a:r>
+              <a:rPr lang="en-US" sz="2200" dirty="0" err="1"/>
+              <a:t>pivot_longer</a:t>
+            </a:r>
+            <a:r>
+              <a:rPr lang="en-US" sz="2200" dirty="0"/>
+              <a:t>() function to transform you </a:t>
+            </a:r>
+            <a:r>
+              <a:rPr lang="en-US" sz="2200" dirty="0" err="1"/>
+              <a:t>lotr_wide</a:t>
+            </a:r>
+            <a:r>
+              <a:rPr lang="en-US" sz="2200" dirty="0"/>
+              <a:t> back to tidy format.</a:t>
+            </a:r>
+          </a:p>
+          <a:p>
+            <a:pPr marL="0" indent="0">
+              <a:buNone/>
+            </a:pPr>
+            <a:br>
+              <a:rPr lang="en-US" sz="2200" dirty="0"/>
+            </a:br>
+            <a:endParaRPr lang="en-US" sz="2200" dirty="0"/>
+          </a:p>
+          <a:p>
+            <a:endParaRPr lang="en-US" sz="2200" dirty="0"/>
+          </a:p>
+        </p:txBody>
+      </p:sp>
+    </p:spTree>
+    <p:extLst>
+      <p:ext uri="{BB962C8B-B14F-4D97-AF65-F5344CB8AC3E}">
+        <p14:creationId xmlns:p14="http://schemas.microsoft.com/office/powerpoint/2010/main" val="1014736989"/>
+      </p:ext>
+    </p:extLst>
+  </p:cSld>
+  <p:clrMapOvr>
+    <a:masterClrMapping/>
+  </p:clrMapOvr>
+</p:sld>
+</file>
+
+<file path=ppt/slides/slide14.xml><?xml version="1.0" encoding="utf-8"?>
+<p:sld xmlns:a="http://schemas.openxmlformats.org/drawingml/2006/main" xmlns:r="http://schemas.openxmlformats.org/officeDocument/2006/relationships" xmlns:p="http://schemas.openxmlformats.org/presentationml/2006/main">
+  <p:cSld>
+    <p:spTree>
+      <p:nvGrpSpPr>
+        <p:cNvPr id="1" name=""/>
+        <p:cNvGrpSpPr/>
+        <p:nvPr/>
+      </p:nvGrpSpPr>
+      <p:grpSpPr>
+        <a:xfrm>
+          <a:off x="0" y="0"/>
+          <a:ext cx="0" cy="0"/>
+          <a:chOff x="0" y="0"/>
+          <a:chExt cx="0" cy="0"/>
+        </a:xfrm>
+      </p:grpSpPr>
+      <p:sp>
+        <p:nvSpPr>
+          <p:cNvPr id="2" name="Title 1">
+            <a:extLst>
+              <a:ext uri="{FF2B5EF4-FFF2-40B4-BE49-F238E27FC236}">
                 <a16:creationId xmlns:a16="http://schemas.microsoft.com/office/drawing/2014/main" id="{A92EDA2D-3043-C1F5-85E8-78160CE274F4}"/>
               </a:ext>
             </a:extLst>
@@ -3843,7 +4035,7 @@
 </p:sld>
 </file>
 
-<file path=ppt/slides/slide14.xml><?xml version="1.0" encoding="utf-8"?>
+<file path=ppt/slides/slide15.xml><?xml version="1.0" encoding="utf-8"?>
 <p:sld xmlns:a="http://schemas.openxmlformats.org/drawingml/2006/main" xmlns:r="http://schemas.openxmlformats.org/officeDocument/2006/relationships" xmlns:p="http://schemas.openxmlformats.org/presentationml/2006/main">
   <p:cSld>
     <p:spTree>
@@ -5128,7 +5320,7 @@
         </p:spPr>
         <p:txBody>
           <a:bodyPr>
-            <a:normAutofit fontScale="92500" lnSpcReduction="10000"/>
+            <a:normAutofit/>
           </a:bodyPr>
           <a:lstStyle/>
           <a:p>
@@ -5137,39 +5329,7 @@
             </a:pPr>
             <a:r>
               <a:rPr lang="en-US" dirty="0"/>
-              <a:t>Compute the rate for table2, and table4a + table4b. You will need to perform four operations:</a:t>
-            </a:r>
-            <a:br>
-              <a:rPr lang="en-US" dirty="0"/>
-            </a:br>
-            <a:endParaRPr lang="en-US" dirty="0"/>
-          </a:p>
-          <a:p>
-            <a:pPr lvl="2"/>
-            <a:r>
-              <a:rPr lang="en-US" dirty="0"/>
-              <a:t>Extract the number of TB cases per country per year.</a:t>
-            </a:r>
-          </a:p>
-          <a:p>
-            <a:pPr lvl="2"/>
-            <a:r>
-              <a:rPr lang="en-US" dirty="0"/>
-              <a:t>Extract the matching population per country per year.</a:t>
-            </a:r>
-          </a:p>
-          <a:p>
-            <a:pPr lvl="2"/>
-            <a:r>
-              <a:rPr lang="en-US" dirty="0"/>
-              <a:t>Divide cases by population, and multiply by 10000.</a:t>
-            </a:r>
-          </a:p>
-          <a:p>
-            <a:pPr lvl="2"/>
-            <a:r>
-              <a:rPr lang="en-US" dirty="0"/>
-              <a:t>Store back in the appropriate place.</a:t>
+              <a:t>For table 1:</a:t>
             </a:r>
           </a:p>
           <a:p>
@@ -5179,19 +5339,62 @@
             <a:endParaRPr lang="en-US" dirty="0"/>
           </a:p>
           <a:p>
-            <a:pPr marL="0" indent="0">
-              <a:buNone/>
+            <a:pPr marL="1028700" lvl="2" indent="-342900">
+              <a:buFont typeface="+mj-lt"/>
+              <a:buAutoNum type="arabicPeriod"/>
             </a:pPr>
-            <a:endParaRPr lang="en-US" dirty="0"/>
-          </a:p>
-          <a:p>
-            <a:pPr marL="0" indent="0">
-              <a:buNone/>
+            <a:r>
+              <a:rPr lang="en-US" sz="2000" dirty="0"/>
+              <a:t>Compute the rate of tuberculosis cases per 10,000 people for each country</a:t>
+            </a:r>
+          </a:p>
+          <a:p>
+            <a:pPr marL="1028700" lvl="2" indent="-342900">
+              <a:buFont typeface="+mj-lt"/>
+              <a:buAutoNum type="arabicPeriod"/>
             </a:pPr>
-            <a:r>
-              <a:rPr lang="en-US" dirty="0"/>
-              <a:t>Which representation is easiest to work with? Which is hardest? Why?</a:t>
-            </a:r>
+            <a:endParaRPr lang="en-US" sz="2000" dirty="0"/>
+          </a:p>
+          <a:p>
+            <a:pPr marL="1028700" lvl="2" indent="-342900">
+              <a:buFont typeface="+mj-lt"/>
+              <a:buAutoNum type="arabicPeriod"/>
+            </a:pPr>
+            <a:r>
+              <a:rPr lang="en-US" sz="2000" dirty="0"/>
+              <a:t>Compute the total cases per year (across all countries)</a:t>
+            </a:r>
+          </a:p>
+          <a:p>
+            <a:pPr marL="1028700" lvl="2" indent="-342900">
+              <a:buFont typeface="+mj-lt"/>
+              <a:buAutoNum type="arabicPeriod"/>
+            </a:pPr>
+            <a:endParaRPr lang="en-US" sz="2000" dirty="0"/>
+          </a:p>
+          <a:p>
+            <a:pPr marL="1028700" lvl="2" indent="-342900">
+              <a:buFont typeface="+mj-lt"/>
+              <a:buAutoNum type="arabicPeriod"/>
+            </a:pPr>
+            <a:r>
+              <a:rPr lang="en-US" sz="2000" dirty="0"/>
+              <a:t>Visualize case counts per country over the years</a:t>
+            </a:r>
+          </a:p>
+          <a:p>
+            <a:pPr marL="457200" indent="-457200">
+              <a:buFont typeface="+mj-lt"/>
+              <a:buAutoNum type="arabicPeriod"/>
+            </a:pPr>
+            <a:endParaRPr lang="en-US" sz="2000" dirty="0"/>
+          </a:p>
+          <a:p>
+            <a:pPr marL="457200" indent="-457200">
+              <a:buFont typeface="+mj-lt"/>
+              <a:buAutoNum type="arabicPeriod"/>
+            </a:pPr>
+            <a:endParaRPr lang="en-US" sz="2000" dirty="0"/>
           </a:p>
           <a:p>
             <a:endParaRPr lang="en-US" dirty="0"/>
@@ -5216,7 +5419,13 @@
   <p:cSld>
     <p:spTree>
       <p:nvGrpSpPr>
-        <p:cNvPr id="1" name=""/>
+        <p:cNvPr id="1" name="">
+          <a:extLst>
+            <a:ext uri="{FF2B5EF4-FFF2-40B4-BE49-F238E27FC236}">
+              <a16:creationId xmlns:a16="http://schemas.microsoft.com/office/drawing/2014/main" id="{7A769119-4BB9-68A2-29D0-3C9E13CA1EE1}"/>
+            </a:ext>
+          </a:extLst>
+        </p:cNvPr>
         <p:cNvGrpSpPr/>
         <p:nvPr/>
       </p:nvGrpSpPr>
@@ -5230,82 +5439,131 @@
       </p:grpSpPr>
       <p:sp>
         <p:nvSpPr>
-          <p:cNvPr id="5" name="TextBox 4">
+          <p:cNvPr id="2" name="Title 1">
             <a:extLst>
               <a:ext uri="{FF2B5EF4-FFF2-40B4-BE49-F238E27FC236}">
-                <a16:creationId xmlns:a16="http://schemas.microsoft.com/office/drawing/2014/main" id="{BA75DFF7-E0E7-8FFE-4059-265BDFD1AEC7}"/>
+                <a16:creationId xmlns:a16="http://schemas.microsoft.com/office/drawing/2014/main" id="{C4BC1A98-B324-3B33-6652-0E7FE666CE19}"/>
               </a:ext>
             </a:extLst>
           </p:cNvPr>
-          <p:cNvSpPr txBox="1"/>
-          <p:nvPr/>
+          <p:cNvSpPr>
+            <a:spLocks noGrp="1"/>
+          </p:cNvSpPr>
+          <p:nvPr>
+            <p:ph type="title"/>
+          </p:nvPr>
+        </p:nvSpPr>
+        <p:spPr/>
+        <p:txBody>
+          <a:bodyPr/>
+          <a:lstStyle/>
+          <a:p>
+            <a:pPr algn="l"/>
+            <a:r>
+              <a:rPr lang="en-US" dirty="0"/>
+              <a:t>Exercise</a:t>
+            </a:r>
+          </a:p>
+        </p:txBody>
+      </p:sp>
+      <p:sp>
+        <p:nvSpPr>
+          <p:cNvPr id="3" name="Content Placeholder 2">
+            <a:extLst>
+              <a:ext uri="{FF2B5EF4-FFF2-40B4-BE49-F238E27FC236}">
+                <a16:creationId xmlns:a16="http://schemas.microsoft.com/office/drawing/2014/main" id="{D957F60D-1C3C-3E32-0C0F-B5AD7E081EF4}"/>
+              </a:ext>
+            </a:extLst>
+          </p:cNvPr>
+          <p:cNvSpPr>
+            <a:spLocks noGrp="1"/>
+          </p:cNvSpPr>
+          <p:nvPr>
+            <p:ph idx="1"/>
+          </p:nvPr>
         </p:nvSpPr>
         <p:spPr>
           <a:xfrm>
-            <a:off x="772510" y="1466523"/>
-            <a:ext cx="7370379" cy="1815882"/>
+            <a:off x="457200" y="1200151"/>
+            <a:ext cx="8229600" cy="3737370"/>
           </a:xfrm>
-          <a:prstGeom prst="rect">
-            <a:avLst/>
-          </a:prstGeom>
-          <a:noFill/>
         </p:spPr>
         <p:txBody>
-          <a:bodyPr wrap="square">
-            <a:spAutoFit/>
+          <a:bodyPr>
+            <a:normAutofit fontScale="92500" lnSpcReduction="10000"/>
           </a:bodyPr>
           <a:lstStyle/>
           <a:p>
-            <a:r>
-              <a:rPr lang="en-US" sz="2800" b="0" i="0" dirty="0">
-                <a:solidFill>
-                  <a:srgbClr val="333333"/>
-                </a:solidFill>
-                <a:effectLst/>
-                <a:latin typeface="Helvetica Neue" panose="02000503000000020004" pitchFamily="2" charset="0"/>
-              </a:rPr>
-              <a:t>If I had one thing to tell biologists learning bioinformatics, it would be “write code for humans, write data for computers” </a:t>
-            </a:r>
-          </a:p>
-          <a:p>
-            <a:r>
-              <a:rPr lang="en-US" sz="2800" b="0" i="0" dirty="0">
-                <a:solidFill>
-                  <a:srgbClr val="333333"/>
-                </a:solidFill>
-                <a:effectLst/>
-                <a:latin typeface="Helvetica Neue" panose="02000503000000020004" pitchFamily="2" charset="0"/>
-              </a:rPr>
-              <a:t>— Vince Buffalo (@</a:t>
-            </a:r>
-            <a:r>
-              <a:rPr lang="en-US" sz="2800" b="0" i="0" dirty="0" err="1">
-                <a:solidFill>
-                  <a:srgbClr val="333333"/>
-                </a:solidFill>
-                <a:effectLst/>
-                <a:latin typeface="Helvetica Neue" panose="02000503000000020004" pitchFamily="2" charset="0"/>
-              </a:rPr>
-              <a:t>vsbuffalo</a:t>
-            </a:r>
-            <a:r>
-              <a:rPr lang="en-US" sz="2800" b="0" i="0" dirty="0">
-                <a:solidFill>
-                  <a:srgbClr val="333333"/>
-                </a:solidFill>
-                <a:effectLst/>
-                <a:latin typeface="Helvetica Neue" panose="02000503000000020004" pitchFamily="2" charset="0"/>
-              </a:rPr>
-              <a:t>)</a:t>
-            </a:r>
-            <a:endParaRPr lang="en-US" sz="2800" dirty="0"/>
+            <a:pPr marL="0" indent="0">
+              <a:buNone/>
+            </a:pPr>
+            <a:r>
+              <a:rPr lang="en-US" dirty="0"/>
+              <a:t>Compute the rate for table2, and table4a + table4b. You will need to perform four operations:</a:t>
+            </a:r>
+            <a:br>
+              <a:rPr lang="en-US" dirty="0"/>
+            </a:br>
+            <a:endParaRPr lang="en-US" dirty="0"/>
+          </a:p>
+          <a:p>
+            <a:pPr lvl="2"/>
+            <a:r>
+              <a:rPr lang="en-US" dirty="0"/>
+              <a:t>Extract the number of TB cases per country per year.</a:t>
+            </a:r>
+          </a:p>
+          <a:p>
+            <a:pPr lvl="2"/>
+            <a:r>
+              <a:rPr lang="en-US" dirty="0"/>
+              <a:t>Extract the matching population per country per year.</a:t>
+            </a:r>
+          </a:p>
+          <a:p>
+            <a:pPr lvl="2"/>
+            <a:r>
+              <a:rPr lang="en-US" dirty="0"/>
+              <a:t>Divide cases by population, and multiply by 10000.</a:t>
+            </a:r>
+          </a:p>
+          <a:p>
+            <a:pPr lvl="2"/>
+            <a:r>
+              <a:rPr lang="en-US" dirty="0"/>
+              <a:t>Store back in the appropriate place.</a:t>
+            </a:r>
+          </a:p>
+          <a:p>
+            <a:pPr marL="0" indent="0">
+              <a:buNone/>
+            </a:pPr>
+            <a:endParaRPr lang="en-US" dirty="0"/>
+          </a:p>
+          <a:p>
+            <a:pPr marL="0" indent="0">
+              <a:buNone/>
+            </a:pPr>
+            <a:endParaRPr lang="en-US" dirty="0"/>
+          </a:p>
+          <a:p>
+            <a:pPr marL="0" indent="0">
+              <a:buNone/>
+            </a:pPr>
+            <a:r>
+              <a:rPr lang="en-US" dirty="0"/>
+              <a:t>Which representation is easiest to work with? Which is hardest? Why?</a:t>
+            </a:r>
+          </a:p>
+          <a:p>
+            <a:endParaRPr lang="en-US" dirty="0"/>
           </a:p>
         </p:txBody>
       </p:sp>
     </p:spTree>
     <p:extLst>
       <p:ext uri="{BB962C8B-B14F-4D97-AF65-F5344CB8AC3E}">
-        <p14:creationId xmlns:p14="http://schemas.microsoft.com/office/powerpoint/2010/main" val="3085358611"/>
+        <p14:creationId xmlns:p14="http://schemas.microsoft.com/office/powerpoint/2010/main" val="2584076008"/>
       </p:ext>
     </p:extLst>
   </p:cSld>
@@ -5334,74 +5592,82 @@
       </p:grpSpPr>
       <p:sp>
         <p:nvSpPr>
-          <p:cNvPr id="2" name="Title 1">
+          <p:cNvPr id="5" name="TextBox 4">
             <a:extLst>
               <a:ext uri="{FF2B5EF4-FFF2-40B4-BE49-F238E27FC236}">
-                <a16:creationId xmlns:a16="http://schemas.microsoft.com/office/drawing/2014/main" id="{22B786A2-7B81-6671-E5B4-569C207DF24A}"/>
+                <a16:creationId xmlns:a16="http://schemas.microsoft.com/office/drawing/2014/main" id="{BA75DFF7-E0E7-8FFE-4059-265BDFD1AEC7}"/>
               </a:ext>
             </a:extLst>
           </p:cNvPr>
-          <p:cNvSpPr>
-            <a:spLocks noGrp="1"/>
-          </p:cNvSpPr>
-          <p:nvPr>
-            <p:ph type="title"/>
-          </p:nvPr>
-        </p:nvSpPr>
-        <p:spPr/>
-        <p:txBody>
-          <a:bodyPr/>
-          <a:lstStyle/>
-          <a:p>
-            <a:pPr algn="l"/>
-            <a:r>
-              <a:rPr lang="en-US" dirty="0"/>
-              <a:t>Common problems</a:t>
-            </a:r>
-          </a:p>
-        </p:txBody>
-      </p:sp>
-      <p:sp>
-        <p:nvSpPr>
-          <p:cNvPr id="3" name="Content Placeholder 2">
-            <a:extLst>
-              <a:ext uri="{FF2B5EF4-FFF2-40B4-BE49-F238E27FC236}">
-                <a16:creationId xmlns:a16="http://schemas.microsoft.com/office/drawing/2014/main" id="{ED4D6A95-275A-ED3E-85DD-6A19E4DCFCA9}"/>
-              </a:ext>
-            </a:extLst>
-          </p:cNvPr>
-          <p:cNvSpPr>
-            <a:spLocks noGrp="1"/>
-          </p:cNvSpPr>
-          <p:nvPr>
-            <p:ph idx="1"/>
-          </p:nvPr>
-        </p:nvSpPr>
-        <p:spPr/>
-        <p:txBody>
-          <a:bodyPr/>
-          <a:lstStyle/>
-          <a:p>
-            <a:r>
-              <a:rPr lang="en-US" dirty="0"/>
-              <a:t>One variable might be spread across multiple columns and sometimes values have ended up in column names</a:t>
-            </a:r>
-          </a:p>
-          <a:p>
-            <a:endParaRPr lang="en-US" dirty="0"/>
-          </a:p>
-          <a:p>
-            <a:r>
-              <a:rPr lang="en-US" dirty="0"/>
-              <a:t>One observation is spread across multiple rows</a:t>
-            </a:r>
+          <p:cNvSpPr txBox="1"/>
+          <p:nvPr/>
+        </p:nvSpPr>
+        <p:spPr>
+          <a:xfrm>
+            <a:off x="772510" y="1466523"/>
+            <a:ext cx="7370379" cy="1815882"/>
+          </a:xfrm>
+          <a:prstGeom prst="rect">
+            <a:avLst/>
+          </a:prstGeom>
+          <a:noFill/>
+        </p:spPr>
+        <p:txBody>
+          <a:bodyPr wrap="square">
+            <a:spAutoFit/>
+          </a:bodyPr>
+          <a:lstStyle/>
+          <a:p>
+            <a:r>
+              <a:rPr lang="en-US" sz="2800" b="0" i="0" dirty="0">
+                <a:solidFill>
+                  <a:srgbClr val="333333"/>
+                </a:solidFill>
+                <a:effectLst/>
+                <a:latin typeface="Helvetica Neue" panose="02000503000000020004" pitchFamily="2" charset="0"/>
+              </a:rPr>
+              <a:t>If I had one thing to tell biologists learning bioinformatics, it would be “write code for humans, write data for computers” </a:t>
+            </a:r>
+          </a:p>
+          <a:p>
+            <a:r>
+              <a:rPr lang="en-US" sz="2800" b="0" i="0" dirty="0">
+                <a:solidFill>
+                  <a:srgbClr val="333333"/>
+                </a:solidFill>
+                <a:effectLst/>
+                <a:latin typeface="Helvetica Neue" panose="02000503000000020004" pitchFamily="2" charset="0"/>
+              </a:rPr>
+              <a:t>— Vince Buffalo (@</a:t>
+            </a:r>
+            <a:r>
+              <a:rPr lang="en-US" sz="2800" b="0" i="0" dirty="0" err="1">
+                <a:solidFill>
+                  <a:srgbClr val="333333"/>
+                </a:solidFill>
+                <a:effectLst/>
+                <a:latin typeface="Helvetica Neue" panose="02000503000000020004" pitchFamily="2" charset="0"/>
+              </a:rPr>
+              <a:t>vsbuffalo</a:t>
+            </a:r>
+            <a:r>
+              <a:rPr lang="en-US" sz="2800" b="0" i="0" dirty="0">
+                <a:solidFill>
+                  <a:srgbClr val="333333"/>
+                </a:solidFill>
+                <a:effectLst/>
+                <a:latin typeface="Helvetica Neue" panose="02000503000000020004" pitchFamily="2" charset="0"/>
+              </a:rPr>
+              <a:t>)</a:t>
+            </a:r>
+            <a:endParaRPr lang="en-US" sz="2800" dirty="0"/>
           </a:p>
         </p:txBody>
       </p:sp>
     </p:spTree>
     <p:extLst>
       <p:ext uri="{BB962C8B-B14F-4D97-AF65-F5344CB8AC3E}">
-        <p14:creationId xmlns:p14="http://schemas.microsoft.com/office/powerpoint/2010/main" val="3956070857"/>
+        <p14:creationId xmlns:p14="http://schemas.microsoft.com/office/powerpoint/2010/main" val="3085358611"/>
       </p:ext>
     </p:extLst>
   </p:cSld>
@@ -5433,7 +5699,7 @@
           <p:cNvPr id="2" name="Title 1">
             <a:extLst>
               <a:ext uri="{FF2B5EF4-FFF2-40B4-BE49-F238E27FC236}">
-                <a16:creationId xmlns:a16="http://schemas.microsoft.com/office/drawing/2014/main" id="{8AFDD491-0015-C04A-B78B-04AB3ACB2BE1}"/>
+                <a16:creationId xmlns:a16="http://schemas.microsoft.com/office/drawing/2014/main" id="{22B786A2-7B81-6671-E5B4-569C207DF24A}"/>
               </a:ext>
             </a:extLst>
           </p:cNvPr>
@@ -5451,140 +5717,45 @@
           <a:p>
             <a:pPr algn="l"/>
             <a:r>
-              <a:rPr lang="en-US" dirty="0" err="1"/>
-              <a:t>pivot_longer</a:t>
-            </a:r>
-            <a:r>
               <a:rPr lang="en-US" dirty="0"/>
-              <a:t>()</a:t>
-            </a:r>
-          </a:p>
-        </p:txBody>
-      </p:sp>
-      <p:pic>
-        <p:nvPicPr>
-          <p:cNvPr id="1026" name="Picture 2" descr="Pivoting `table4` into a longer, tidy form.">
+              <a:t>Common problems</a:t>
+            </a:r>
+          </a:p>
+        </p:txBody>
+      </p:sp>
+      <p:sp>
+        <p:nvSpPr>
+          <p:cNvPr id="3" name="Content Placeholder 2">
             <a:extLst>
               <a:ext uri="{FF2B5EF4-FFF2-40B4-BE49-F238E27FC236}">
-                <a16:creationId xmlns:a16="http://schemas.microsoft.com/office/drawing/2014/main" id="{EC7CBF08-835A-9940-BB14-EBBAA325D1B9}"/>
+                <a16:creationId xmlns:a16="http://schemas.microsoft.com/office/drawing/2014/main" id="{ED4D6A95-275A-ED3E-85DD-6A19E4DCFCA9}"/>
               </a:ext>
             </a:extLst>
           </p:cNvPr>
-          <p:cNvPicPr>
-            <a:picLocks noChangeAspect="1" noChangeArrowheads="1"/>
-          </p:cNvPicPr>
-          <p:nvPr/>
-        </p:nvPicPr>
-        <p:blipFill>
-          <a:blip r:embed="rId2">
-            <a:extLst>
-              <a:ext uri="{28A0092B-C50C-407E-A947-70E740481C1C}">
-                <a14:useLocalDpi xmlns:a14="http://schemas.microsoft.com/office/drawing/2010/main" val="0"/>
-              </a:ext>
-            </a:extLst>
-          </a:blip>
-          <a:srcRect/>
-          <a:stretch>
-            <a:fillRect/>
-          </a:stretch>
-        </p:blipFill>
-        <p:spPr bwMode="auto">
-          <a:xfrm>
-            <a:off x="1338943" y="2406081"/>
-            <a:ext cx="8066314" cy="2520723"/>
-          </a:xfrm>
-          <a:prstGeom prst="rect">
-            <a:avLst/>
-          </a:prstGeom>
-          <a:noFill/>
-          <a:extLst>
-            <a:ext uri="{909E8E84-426E-40DD-AFC4-6F175D3DCCD1}">
-              <a14:hiddenFill xmlns:a14="http://schemas.microsoft.com/office/drawing/2010/main">
-                <a:solidFill>
-                  <a:srgbClr val="FFFFFF"/>
-                </a:solidFill>
-              </a14:hiddenFill>
-            </a:ext>
-          </a:extLst>
-        </p:spPr>
-      </p:pic>
-      <p:sp>
-        <p:nvSpPr>
-          <p:cNvPr id="8" name="TextBox 7">
-            <a:extLst>
-              <a:ext uri="{FF2B5EF4-FFF2-40B4-BE49-F238E27FC236}">
-                <a16:creationId xmlns:a16="http://schemas.microsoft.com/office/drawing/2014/main" id="{61923A5B-6188-2340-AF2E-D33BB6C039F8}"/>
-              </a:ext>
-            </a:extLst>
-          </p:cNvPr>
-          <p:cNvSpPr txBox="1"/>
-          <p:nvPr/>
-        </p:nvSpPr>
-        <p:spPr>
-          <a:xfrm>
-            <a:off x="537410" y="1305075"/>
-            <a:ext cx="7234989" cy="584775"/>
-          </a:xfrm>
-          <a:prstGeom prst="rect">
-            <a:avLst/>
-          </a:prstGeom>
-          <a:noFill/>
-        </p:spPr>
-        <p:txBody>
-          <a:bodyPr wrap="square">
-            <a:spAutoFit/>
-          </a:bodyPr>
-          <a:lstStyle/>
-          <a:p>
-            <a:r>
-              <a:rPr lang="en-US" sz="1600" dirty="0">
-                <a:latin typeface="Avenir Book" panose="02000503020000020003" pitchFamily="2" charset="0"/>
-              </a:rPr>
-              <a:t>table4a %&gt;% </a:t>
-            </a:r>
-          </a:p>
-          <a:p>
-            <a:r>
-              <a:rPr lang="en-US" sz="1600" dirty="0">
-                <a:latin typeface="Avenir Book" panose="02000503020000020003" pitchFamily="2" charset="0"/>
-              </a:rPr>
-              <a:t>  </a:t>
-            </a:r>
-            <a:r>
-              <a:rPr lang="en-US" sz="1600" dirty="0" err="1">
-                <a:latin typeface="Avenir Book" panose="02000503020000020003" pitchFamily="2" charset="0"/>
-              </a:rPr>
-              <a:t>pivot_longer</a:t>
-            </a:r>
-            <a:r>
-              <a:rPr lang="en-US" sz="1600" dirty="0">
-                <a:latin typeface="Avenir Book" panose="02000503020000020003" pitchFamily="2" charset="0"/>
-              </a:rPr>
-              <a:t>(c(`1999`, `2000`), </a:t>
-            </a:r>
-            <a:r>
-              <a:rPr lang="en-US" sz="1600" dirty="0" err="1">
-                <a:latin typeface="Avenir Book" panose="02000503020000020003" pitchFamily="2" charset="0"/>
-              </a:rPr>
-              <a:t>names_to</a:t>
-            </a:r>
-            <a:r>
-              <a:rPr lang="en-US" sz="1600" dirty="0">
-                <a:latin typeface="Avenir Book" panose="02000503020000020003" pitchFamily="2" charset="0"/>
-              </a:rPr>
-              <a:t> = "year", </a:t>
-            </a:r>
-            <a:r>
-              <a:rPr lang="en-US" sz="1600" dirty="0" err="1">
-                <a:latin typeface="Avenir Book" panose="02000503020000020003" pitchFamily="2" charset="0"/>
-              </a:rPr>
-              <a:t>values_to</a:t>
-            </a:r>
-            <a:r>
-              <a:rPr lang="en-US" sz="1600" dirty="0">
-                <a:latin typeface="Avenir Book" panose="02000503020000020003" pitchFamily="2" charset="0"/>
-              </a:rPr>
-              <a:t> = "cases")</a:t>
+          <p:cNvSpPr>
+            <a:spLocks noGrp="1"/>
+          </p:cNvSpPr>
+          <p:nvPr>
+            <p:ph idx="1"/>
+          </p:nvPr>
+        </p:nvSpPr>
+        <p:spPr/>
+        <p:txBody>
+          <a:bodyPr/>
+          <a:lstStyle/>
+          <a:p>
+            <a:r>
+              <a:rPr lang="en-US" dirty="0"/>
+              <a:t>One variable might be spread across multiple columns and sometimes values have ended up in column names</a:t>
+            </a:r>
+          </a:p>
+          <a:p>
+            <a:endParaRPr lang="en-US" dirty="0"/>
+          </a:p>
+          <a:p>
+            <a:r>
+              <a:rPr lang="en-US" dirty="0"/>
+              <a:t>One observation is spread across multiple rows</a:t>
             </a:r>
           </a:p>
         </p:txBody>
@@ -5592,7 +5763,7 @@
     </p:spTree>
     <p:extLst>
       <p:ext uri="{BB962C8B-B14F-4D97-AF65-F5344CB8AC3E}">
-        <p14:creationId xmlns:p14="http://schemas.microsoft.com/office/powerpoint/2010/main" val="1477975852"/>
+        <p14:creationId xmlns:p14="http://schemas.microsoft.com/office/powerpoint/2010/main" val="3956070857"/>
       </p:ext>
     </p:extLst>
   </p:cSld>

--- a/slides/Slides_tidydata.pptx
+++ b/slides/Slides_tidydata.pptx
@@ -3132,31 +3132,6 @@
           </a:p>
         </p:txBody>
       </p:sp>
-      <p:sp>
-        <p:nvSpPr>
-          <p:cNvPr id="3" name="Subtitle 2">
-            <a:extLst>
-              <a:ext uri="{FF2B5EF4-FFF2-40B4-BE49-F238E27FC236}">
-                <a16:creationId xmlns:a16="http://schemas.microsoft.com/office/drawing/2014/main" id="{D6C7493B-1516-BA4F-B6AC-EE8712EADEDA}"/>
-              </a:ext>
-            </a:extLst>
-          </p:cNvPr>
-          <p:cNvSpPr>
-            <a:spLocks noGrp="1"/>
-          </p:cNvSpPr>
-          <p:nvPr>
-            <p:ph type="subTitle" idx="1"/>
-          </p:nvPr>
-        </p:nvSpPr>
-        <p:spPr/>
-        <p:txBody>
-          <a:bodyPr/>
-          <a:lstStyle/>
-          <a:p>
-            <a:endParaRPr lang="en-US"/>
-          </a:p>
-        </p:txBody>
-      </p:sp>
     </p:spTree>
     <p:extLst>
       <p:ext uri="{BB962C8B-B14F-4D97-AF65-F5344CB8AC3E}">
@@ -3299,7 +3274,7 @@
               <a:rPr lang="en-US" sz="1600" dirty="0">
                 <a:latin typeface="Avenir Book" panose="02000503020000020003" pitchFamily="2" charset="0"/>
               </a:rPr>
-              <a:t>table4a %&gt;% </a:t>
+              <a:t>table4a |&gt; </a:t>
             </a:r>
           </a:p>
           <a:p>
@@ -3443,7 +3418,7 @@
               <a:rPr lang="en-US" sz="1600" dirty="0">
                 <a:latin typeface="Avenir Book" panose="02000503020000020003" pitchFamily="2" charset="0"/>
               </a:rPr>
-              <a:t>table2 %&gt;%</a:t>
+              <a:t>table2 |&gt; </a:t>
             </a:r>
           </a:p>
           <a:p>
@@ -3630,7 +3605,7 @@
               <a:rPr lang="en-US" sz="1600" dirty="0">
                 <a:latin typeface="Avenir Book" panose="02000503020000020003" pitchFamily="2" charset="0"/>
               </a:rPr>
-              <a:t>table3 %&gt;% </a:t>
+              <a:t>table3 |&gt; </a:t>
             </a:r>
           </a:p>
           <a:p>
@@ -5345,7 +5320,7 @@
             </a:pPr>
             <a:r>
               <a:rPr lang="en-US" sz="2000" dirty="0"/>
-              <a:t>Compute the rate of tuberculosis cases per 10,000 people for each country</a:t>
+              <a:t>Compute the rate of tuberculosis cases per 10,000 people for each country and year (i.e. number of cases / population * 10000)</a:t>
             </a:r>
           </a:p>
           <a:p>
